--- a/04_monitoring/beta_2025.2.12.pptx
+++ b/04_monitoring/beta_2025.2.12.pptx
@@ -19,6 +19,8 @@
     <p:sldId id="257" r:id="rId13"/>
     <p:sldId id="259" r:id="rId14"/>
     <p:sldId id="267" r:id="rId15"/>
+    <p:sldId id="270" r:id="rId16"/>
+    <p:sldId id="271" r:id="rId17"/>
   </p:sldIdLst>
   <p:sldSz cx="12192000" cy="6858000"/>
   <p:notesSz cx="6858000" cy="9144000"/>
@@ -146,6 +148,12 @@
             <p14:sldId id="267"/>
           </p14:sldIdLst>
         </p14:section>
+        <p14:section name="Stocks_Screening" id="{0903FE91-6843-4F64-B402-C15EA5A71947}">
+          <p14:sldIdLst>
+            <p14:sldId id="270"/>
+            <p14:sldId id="271"/>
+          </p14:sldIdLst>
+        </p14:section>
       </p14:sectionLst>
     </p:ext>
     <p:ext uri="{EFAFB233-063F-42B5-8137-9DF3F51BA10A}">
@@ -302,7 +310,7 @@
           <a:p>
             <a:fld id="{E5820CF9-F688-44A5-98E2-16B853B01EB7}" type="datetimeFigureOut">
               <a:rPr lang="en-US" smtClean="0"/>
-              <a:t>2/13/2025</a:t>
+              <a:t>2/14/2025</a:t>
             </a:fld>
             <a:endParaRPr lang="en-US"/>
           </a:p>
@@ -500,7 +508,7 @@
           <a:p>
             <a:fld id="{E5820CF9-F688-44A5-98E2-16B853B01EB7}" type="datetimeFigureOut">
               <a:rPr lang="en-US" smtClean="0"/>
-              <a:t>2/13/2025</a:t>
+              <a:t>2/14/2025</a:t>
             </a:fld>
             <a:endParaRPr lang="en-US"/>
           </a:p>
@@ -708,7 +716,7 @@
           <a:p>
             <a:fld id="{E5820CF9-F688-44A5-98E2-16B853B01EB7}" type="datetimeFigureOut">
               <a:rPr lang="en-US" smtClean="0"/>
-              <a:t>2/13/2025</a:t>
+              <a:t>2/14/2025</a:t>
             </a:fld>
             <a:endParaRPr lang="en-US"/>
           </a:p>
@@ -906,7 +914,7 @@
           <a:p>
             <a:fld id="{E5820CF9-F688-44A5-98E2-16B853B01EB7}" type="datetimeFigureOut">
               <a:rPr lang="en-US" smtClean="0"/>
-              <a:t>2/13/2025</a:t>
+              <a:t>2/14/2025</a:t>
             </a:fld>
             <a:endParaRPr lang="en-US"/>
           </a:p>
@@ -1181,7 +1189,7 @@
           <a:p>
             <a:fld id="{E5820CF9-F688-44A5-98E2-16B853B01EB7}" type="datetimeFigureOut">
               <a:rPr lang="en-US" smtClean="0"/>
-              <a:t>2/13/2025</a:t>
+              <a:t>2/14/2025</a:t>
             </a:fld>
             <a:endParaRPr lang="en-US"/>
           </a:p>
@@ -1446,7 +1454,7 @@
           <a:p>
             <a:fld id="{E5820CF9-F688-44A5-98E2-16B853B01EB7}" type="datetimeFigureOut">
               <a:rPr lang="en-US" smtClean="0"/>
-              <a:t>2/13/2025</a:t>
+              <a:t>2/14/2025</a:t>
             </a:fld>
             <a:endParaRPr lang="en-US"/>
           </a:p>
@@ -1858,7 +1866,7 @@
           <a:p>
             <a:fld id="{E5820CF9-F688-44A5-98E2-16B853B01EB7}" type="datetimeFigureOut">
               <a:rPr lang="en-US" smtClean="0"/>
-              <a:t>2/13/2025</a:t>
+              <a:t>2/14/2025</a:t>
             </a:fld>
             <a:endParaRPr lang="en-US"/>
           </a:p>
@@ -1999,7 +2007,7 @@
           <a:p>
             <a:fld id="{E5820CF9-F688-44A5-98E2-16B853B01EB7}" type="datetimeFigureOut">
               <a:rPr lang="en-US" smtClean="0"/>
-              <a:t>2/13/2025</a:t>
+              <a:t>2/14/2025</a:t>
             </a:fld>
             <a:endParaRPr lang="en-US"/>
           </a:p>
@@ -2112,7 +2120,7 @@
           <a:p>
             <a:fld id="{E5820CF9-F688-44A5-98E2-16B853B01EB7}" type="datetimeFigureOut">
               <a:rPr lang="en-US" smtClean="0"/>
-              <a:t>2/13/2025</a:t>
+              <a:t>2/14/2025</a:t>
             </a:fld>
             <a:endParaRPr lang="en-US"/>
           </a:p>
@@ -2423,7 +2431,7 @@
           <a:p>
             <a:fld id="{E5820CF9-F688-44A5-98E2-16B853B01EB7}" type="datetimeFigureOut">
               <a:rPr lang="en-US" smtClean="0"/>
-              <a:t>2/13/2025</a:t>
+              <a:t>2/14/2025</a:t>
             </a:fld>
             <a:endParaRPr lang="en-US"/>
           </a:p>
@@ -2711,7 +2719,7 @@
           <a:p>
             <a:fld id="{E5820CF9-F688-44A5-98E2-16B853B01EB7}" type="datetimeFigureOut">
               <a:rPr lang="en-US" smtClean="0"/>
-              <a:t>2/13/2025</a:t>
+              <a:t>2/14/2025</a:t>
             </a:fld>
             <a:endParaRPr lang="en-US"/>
           </a:p>
@@ -2952,7 +2960,7 @@
           <a:p>
             <a:fld id="{E5820CF9-F688-44A5-98E2-16B853B01EB7}" type="datetimeFigureOut">
               <a:rPr lang="en-US" smtClean="0"/>
-              <a:t>2/13/2025</a:t>
+              <a:t>2/14/2025</a:t>
             </a:fld>
             <a:endParaRPr lang="en-US"/>
           </a:p>
@@ -3988,6 +3996,216 @@
 </p:sld>
 </file>
 
+<file path=ppt/slides/slide15.xml><?xml version="1.0" encoding="utf-8"?>
+<p:sld xmlns:a="http://schemas.openxmlformats.org/drawingml/2006/main" xmlns:r="http://schemas.openxmlformats.org/officeDocument/2006/relationships" xmlns:p="http://schemas.openxmlformats.org/presentationml/2006/main">
+  <p:cSld>
+    <p:spTree>
+      <p:nvGrpSpPr>
+        <p:cNvPr id="1" name="">
+          <a:extLst>
+            <a:ext uri="{FF2B5EF4-FFF2-40B4-BE49-F238E27FC236}">
+              <a16:creationId xmlns:a16="http://schemas.microsoft.com/office/drawing/2014/main" id="{69BA023B-9B83-CAFE-281F-1E471009DE1C}"/>
+            </a:ext>
+          </a:extLst>
+        </p:cNvPr>
+        <p:cNvGrpSpPr/>
+        <p:nvPr/>
+      </p:nvGrpSpPr>
+      <p:grpSpPr>
+        <a:xfrm>
+          <a:off x="0" y="0"/>
+          <a:ext cx="0" cy="0"/>
+          <a:chOff x="0" y="0"/>
+          <a:chExt cx="0" cy="0"/>
+        </a:xfrm>
+      </p:grpSpPr>
+      <p:sp>
+        <p:nvSpPr>
+          <p:cNvPr id="2" name="Title 1">
+            <a:extLst>
+              <a:ext uri="{FF2B5EF4-FFF2-40B4-BE49-F238E27FC236}">
+                <a16:creationId xmlns:a16="http://schemas.microsoft.com/office/drawing/2014/main" id="{21306621-0B55-5D31-DAA4-71580FEE82C6}"/>
+              </a:ext>
+            </a:extLst>
+          </p:cNvPr>
+          <p:cNvSpPr>
+            <a:spLocks noGrp="1"/>
+          </p:cNvSpPr>
+          <p:nvPr>
+            <p:ph type="title"/>
+          </p:nvPr>
+        </p:nvSpPr>
+        <p:spPr>
+          <a:xfrm>
+            <a:off x="0" y="0"/>
+            <a:ext cx="10515600" cy="1325563"/>
+          </a:xfrm>
+        </p:spPr>
+        <p:txBody>
+          <a:bodyPr/>
+          <a:lstStyle/>
+          <a:p>
+            <a:r>
+              <a:rPr lang="en-US" sz="1800" b="1" dirty="0">
+                <a:solidFill>
+                  <a:srgbClr val="000000"/>
+                </a:solidFill>
+                <a:latin typeface="Calibri" panose="020F0502020204030204" pitchFamily="34" charset="0"/>
+              </a:rPr>
+              <a:t>Fundamental Score</a:t>
+            </a:r>
+            <a:endParaRPr lang="en-US" dirty="0"/>
+          </a:p>
+        </p:txBody>
+      </p:sp>
+      <p:pic>
+        <p:nvPicPr>
+          <p:cNvPr id="4" name="Picture 3">
+            <a:extLst>
+              <a:ext uri="{FF2B5EF4-FFF2-40B4-BE49-F238E27FC236}">
+                <a16:creationId xmlns:a16="http://schemas.microsoft.com/office/drawing/2014/main" id="{4AB3FF80-D850-15FA-862F-C04D22A88E00}"/>
+              </a:ext>
+            </a:extLst>
+          </p:cNvPr>
+          <p:cNvPicPr>
+            <a:picLocks noChangeAspect="1"/>
+          </p:cNvPicPr>
+          <p:nvPr/>
+        </p:nvPicPr>
+        <p:blipFill>
+          <a:blip r:embed="rId2"/>
+          <a:stretch>
+            <a:fillRect/>
+          </a:stretch>
+        </p:blipFill>
+        <p:spPr>
+          <a:xfrm>
+            <a:off x="1219200" y="971550"/>
+            <a:ext cx="9753600" cy="5486400"/>
+          </a:xfrm>
+          <a:prstGeom prst="rect">
+            <a:avLst/>
+          </a:prstGeom>
+        </p:spPr>
+      </p:pic>
+    </p:spTree>
+    <p:extLst>
+      <p:ext uri="{BB962C8B-B14F-4D97-AF65-F5344CB8AC3E}">
+        <p14:creationId xmlns:p14="http://schemas.microsoft.com/office/powerpoint/2010/main" val="1885649831"/>
+      </p:ext>
+    </p:extLst>
+  </p:cSld>
+  <p:clrMapOvr>
+    <a:masterClrMapping/>
+  </p:clrMapOvr>
+</p:sld>
+</file>
+
+<file path=ppt/slides/slide16.xml><?xml version="1.0" encoding="utf-8"?>
+<p:sld xmlns:a="http://schemas.openxmlformats.org/drawingml/2006/main" xmlns:r="http://schemas.openxmlformats.org/officeDocument/2006/relationships" xmlns:p="http://schemas.openxmlformats.org/presentationml/2006/main">
+  <p:cSld>
+    <p:spTree>
+      <p:nvGrpSpPr>
+        <p:cNvPr id="1" name="">
+          <a:extLst>
+            <a:ext uri="{FF2B5EF4-FFF2-40B4-BE49-F238E27FC236}">
+              <a16:creationId xmlns:a16="http://schemas.microsoft.com/office/drawing/2014/main" id="{210E0A29-0E44-61FE-318B-151003CEAC48}"/>
+            </a:ext>
+          </a:extLst>
+        </p:cNvPr>
+        <p:cNvGrpSpPr/>
+        <p:nvPr/>
+      </p:nvGrpSpPr>
+      <p:grpSpPr>
+        <a:xfrm>
+          <a:off x="0" y="0"/>
+          <a:ext cx="0" cy="0"/>
+          <a:chOff x="0" y="0"/>
+          <a:chExt cx="0" cy="0"/>
+        </a:xfrm>
+      </p:grpSpPr>
+      <p:sp>
+        <p:nvSpPr>
+          <p:cNvPr id="2" name="Title 1">
+            <a:extLst>
+              <a:ext uri="{FF2B5EF4-FFF2-40B4-BE49-F238E27FC236}">
+                <a16:creationId xmlns:a16="http://schemas.microsoft.com/office/drawing/2014/main" id="{F39AF216-4CD3-F004-4512-E4B987435D01}"/>
+              </a:ext>
+            </a:extLst>
+          </p:cNvPr>
+          <p:cNvSpPr>
+            <a:spLocks noGrp="1"/>
+          </p:cNvSpPr>
+          <p:nvPr>
+            <p:ph type="title"/>
+          </p:nvPr>
+        </p:nvSpPr>
+        <p:spPr>
+          <a:xfrm>
+            <a:off x="0" y="0"/>
+            <a:ext cx="10515600" cy="1325563"/>
+          </a:xfrm>
+        </p:spPr>
+        <p:txBody>
+          <a:bodyPr/>
+          <a:lstStyle/>
+          <a:p>
+            <a:r>
+              <a:rPr lang="en-US" sz="1800" b="1" dirty="0">
+                <a:solidFill>
+                  <a:srgbClr val="000000"/>
+                </a:solidFill>
+                <a:latin typeface="Calibri" panose="020F0502020204030204" pitchFamily="34" charset="0"/>
+              </a:rPr>
+              <a:t>Momentum</a:t>
+            </a:r>
+            <a:endParaRPr lang="en-US" dirty="0"/>
+          </a:p>
+        </p:txBody>
+      </p:sp>
+      <p:pic>
+        <p:nvPicPr>
+          <p:cNvPr id="7" name="Picture 6">
+            <a:extLst>
+              <a:ext uri="{FF2B5EF4-FFF2-40B4-BE49-F238E27FC236}">
+                <a16:creationId xmlns:a16="http://schemas.microsoft.com/office/drawing/2014/main" id="{3ABE6C22-86FE-C610-D1EF-5DB34537ED6F}"/>
+              </a:ext>
+            </a:extLst>
+          </p:cNvPr>
+          <p:cNvPicPr>
+            <a:picLocks noChangeAspect="1"/>
+          </p:cNvPicPr>
+          <p:nvPr/>
+        </p:nvPicPr>
+        <p:blipFill>
+          <a:blip r:embed="rId2"/>
+          <a:stretch>
+            <a:fillRect/>
+          </a:stretch>
+        </p:blipFill>
+        <p:spPr>
+          <a:xfrm>
+            <a:off x="1143000" y="1085850"/>
+            <a:ext cx="9753600" cy="5486400"/>
+          </a:xfrm>
+          <a:prstGeom prst="rect">
+            <a:avLst/>
+          </a:prstGeom>
+        </p:spPr>
+      </p:pic>
+    </p:spTree>
+    <p:extLst>
+      <p:ext uri="{BB962C8B-B14F-4D97-AF65-F5344CB8AC3E}">
+        <p14:creationId xmlns:p14="http://schemas.microsoft.com/office/powerpoint/2010/main" val="928944187"/>
+      </p:ext>
+    </p:extLst>
+  </p:cSld>
+  <p:clrMapOvr>
+    <a:masterClrMapping/>
+  </p:clrMapOvr>
+</p:sld>
+</file>
+
 <file path=ppt/slides/slide2.xml><?xml version="1.0" encoding="utf-8"?>
 <p:sld xmlns:a="http://schemas.openxmlformats.org/drawingml/2006/main" xmlns:r="http://schemas.openxmlformats.org/officeDocument/2006/relationships" xmlns:p="http://schemas.openxmlformats.org/presentationml/2006/main">
   <p:cSld>

--- a/04_monitoring/beta_2025.2.12.pptx
+++ b/04_monitoring/beta_2025.2.12.pptx
@@ -310,7 +310,7 @@
           <a:p>
             <a:fld id="{E5820CF9-F688-44A5-98E2-16B853B01EB7}" type="datetimeFigureOut">
               <a:rPr lang="en-US" smtClean="0"/>
-              <a:t>2/14/2025</a:t>
+              <a:t>2/15/2025</a:t>
             </a:fld>
             <a:endParaRPr lang="en-US"/>
           </a:p>
@@ -508,7 +508,7 @@
           <a:p>
             <a:fld id="{E5820CF9-F688-44A5-98E2-16B853B01EB7}" type="datetimeFigureOut">
               <a:rPr lang="en-US" smtClean="0"/>
-              <a:t>2/14/2025</a:t>
+              <a:t>2/15/2025</a:t>
             </a:fld>
             <a:endParaRPr lang="en-US"/>
           </a:p>
@@ -716,7 +716,7 @@
           <a:p>
             <a:fld id="{E5820CF9-F688-44A5-98E2-16B853B01EB7}" type="datetimeFigureOut">
               <a:rPr lang="en-US" smtClean="0"/>
-              <a:t>2/14/2025</a:t>
+              <a:t>2/15/2025</a:t>
             </a:fld>
             <a:endParaRPr lang="en-US"/>
           </a:p>
@@ -914,7 +914,7 @@
           <a:p>
             <a:fld id="{E5820CF9-F688-44A5-98E2-16B853B01EB7}" type="datetimeFigureOut">
               <a:rPr lang="en-US" smtClean="0"/>
-              <a:t>2/14/2025</a:t>
+              <a:t>2/15/2025</a:t>
             </a:fld>
             <a:endParaRPr lang="en-US"/>
           </a:p>
@@ -1189,7 +1189,7 @@
           <a:p>
             <a:fld id="{E5820CF9-F688-44A5-98E2-16B853B01EB7}" type="datetimeFigureOut">
               <a:rPr lang="en-US" smtClean="0"/>
-              <a:t>2/14/2025</a:t>
+              <a:t>2/15/2025</a:t>
             </a:fld>
             <a:endParaRPr lang="en-US"/>
           </a:p>
@@ -1454,7 +1454,7 @@
           <a:p>
             <a:fld id="{E5820CF9-F688-44A5-98E2-16B853B01EB7}" type="datetimeFigureOut">
               <a:rPr lang="en-US" smtClean="0"/>
-              <a:t>2/14/2025</a:t>
+              <a:t>2/15/2025</a:t>
             </a:fld>
             <a:endParaRPr lang="en-US"/>
           </a:p>
@@ -1866,7 +1866,7 @@
           <a:p>
             <a:fld id="{E5820CF9-F688-44A5-98E2-16B853B01EB7}" type="datetimeFigureOut">
               <a:rPr lang="en-US" smtClean="0"/>
-              <a:t>2/14/2025</a:t>
+              <a:t>2/15/2025</a:t>
             </a:fld>
             <a:endParaRPr lang="en-US"/>
           </a:p>
@@ -2007,7 +2007,7 @@
           <a:p>
             <a:fld id="{E5820CF9-F688-44A5-98E2-16B853B01EB7}" type="datetimeFigureOut">
               <a:rPr lang="en-US" smtClean="0"/>
-              <a:t>2/14/2025</a:t>
+              <a:t>2/15/2025</a:t>
             </a:fld>
             <a:endParaRPr lang="en-US"/>
           </a:p>
@@ -2120,7 +2120,7 @@
           <a:p>
             <a:fld id="{E5820CF9-F688-44A5-98E2-16B853B01EB7}" type="datetimeFigureOut">
               <a:rPr lang="en-US" smtClean="0"/>
-              <a:t>2/14/2025</a:t>
+              <a:t>2/15/2025</a:t>
             </a:fld>
             <a:endParaRPr lang="en-US"/>
           </a:p>
@@ -2431,7 +2431,7 @@
           <a:p>
             <a:fld id="{E5820CF9-F688-44A5-98E2-16B853B01EB7}" type="datetimeFigureOut">
               <a:rPr lang="en-US" smtClean="0"/>
-              <a:t>2/14/2025</a:t>
+              <a:t>2/15/2025</a:t>
             </a:fld>
             <a:endParaRPr lang="en-US"/>
           </a:p>
@@ -2719,7 +2719,7 @@
           <a:p>
             <a:fld id="{E5820CF9-F688-44A5-98E2-16B853B01EB7}" type="datetimeFigureOut">
               <a:rPr lang="en-US" smtClean="0"/>
-              <a:t>2/14/2025</a:t>
+              <a:t>2/15/2025</a:t>
             </a:fld>
             <a:endParaRPr lang="en-US"/>
           </a:p>
@@ -2960,7 +2960,7 @@
           <a:p>
             <a:fld id="{E5820CF9-F688-44A5-98E2-16B853B01EB7}" type="datetimeFigureOut">
               <a:rPr lang="en-US" smtClean="0"/>
-              <a:t>2/14/2025</a:t>
+              <a:t>2/15/2025</a:t>
             </a:fld>
             <a:endParaRPr lang="en-US"/>
           </a:p>
@@ -4185,7 +4185,7 @@
         </p:blipFill>
         <p:spPr>
           <a:xfrm>
-            <a:off x="1143000" y="1085850"/>
+            <a:off x="1123265" y="1085850"/>
             <a:ext cx="9753600" cy="5486400"/>
           </a:xfrm>
           <a:prstGeom prst="rect">

--- a/04_monitoring/beta_2025.2.12.pptx
+++ b/04_monitoring/beta_2025.2.12.pptx
@@ -21,6 +21,7 @@
     <p:sldId id="267" r:id="rId15"/>
     <p:sldId id="270" r:id="rId16"/>
     <p:sldId id="271" r:id="rId17"/>
+    <p:sldId id="272" r:id="rId18"/>
   </p:sldIdLst>
   <p:sldSz cx="12192000" cy="6858000"/>
   <p:notesSz cx="6858000" cy="9144000"/>
@@ -152,6 +153,7 @@
           <p14:sldIdLst>
             <p14:sldId id="270"/>
             <p14:sldId id="271"/>
+            <p14:sldId id="272"/>
           </p14:sldIdLst>
         </p14:section>
       </p14:sectionLst>
@@ -310,7 +312,7 @@
           <a:p>
             <a:fld id="{E5820CF9-F688-44A5-98E2-16B853B01EB7}" type="datetimeFigureOut">
               <a:rPr lang="en-US" smtClean="0"/>
-              <a:t>2/15/2025</a:t>
+              <a:t>2/16/2025</a:t>
             </a:fld>
             <a:endParaRPr lang="en-US"/>
           </a:p>
@@ -508,7 +510,7 @@
           <a:p>
             <a:fld id="{E5820CF9-F688-44A5-98E2-16B853B01EB7}" type="datetimeFigureOut">
               <a:rPr lang="en-US" smtClean="0"/>
-              <a:t>2/15/2025</a:t>
+              <a:t>2/16/2025</a:t>
             </a:fld>
             <a:endParaRPr lang="en-US"/>
           </a:p>
@@ -716,7 +718,7 @@
           <a:p>
             <a:fld id="{E5820CF9-F688-44A5-98E2-16B853B01EB7}" type="datetimeFigureOut">
               <a:rPr lang="en-US" smtClean="0"/>
-              <a:t>2/15/2025</a:t>
+              <a:t>2/16/2025</a:t>
             </a:fld>
             <a:endParaRPr lang="en-US"/>
           </a:p>
@@ -914,7 +916,7 @@
           <a:p>
             <a:fld id="{E5820CF9-F688-44A5-98E2-16B853B01EB7}" type="datetimeFigureOut">
               <a:rPr lang="en-US" smtClean="0"/>
-              <a:t>2/15/2025</a:t>
+              <a:t>2/16/2025</a:t>
             </a:fld>
             <a:endParaRPr lang="en-US"/>
           </a:p>
@@ -1189,7 +1191,7 @@
           <a:p>
             <a:fld id="{E5820CF9-F688-44A5-98E2-16B853B01EB7}" type="datetimeFigureOut">
               <a:rPr lang="en-US" smtClean="0"/>
-              <a:t>2/15/2025</a:t>
+              <a:t>2/16/2025</a:t>
             </a:fld>
             <a:endParaRPr lang="en-US"/>
           </a:p>
@@ -1454,7 +1456,7 @@
           <a:p>
             <a:fld id="{E5820CF9-F688-44A5-98E2-16B853B01EB7}" type="datetimeFigureOut">
               <a:rPr lang="en-US" smtClean="0"/>
-              <a:t>2/15/2025</a:t>
+              <a:t>2/16/2025</a:t>
             </a:fld>
             <a:endParaRPr lang="en-US"/>
           </a:p>
@@ -1866,7 +1868,7 @@
           <a:p>
             <a:fld id="{E5820CF9-F688-44A5-98E2-16B853B01EB7}" type="datetimeFigureOut">
               <a:rPr lang="en-US" smtClean="0"/>
-              <a:t>2/15/2025</a:t>
+              <a:t>2/16/2025</a:t>
             </a:fld>
             <a:endParaRPr lang="en-US"/>
           </a:p>
@@ -2007,7 +2009,7 @@
           <a:p>
             <a:fld id="{E5820CF9-F688-44A5-98E2-16B853B01EB7}" type="datetimeFigureOut">
               <a:rPr lang="en-US" smtClean="0"/>
-              <a:t>2/15/2025</a:t>
+              <a:t>2/16/2025</a:t>
             </a:fld>
             <a:endParaRPr lang="en-US"/>
           </a:p>
@@ -2120,7 +2122,7 @@
           <a:p>
             <a:fld id="{E5820CF9-F688-44A5-98E2-16B853B01EB7}" type="datetimeFigureOut">
               <a:rPr lang="en-US" smtClean="0"/>
-              <a:t>2/15/2025</a:t>
+              <a:t>2/16/2025</a:t>
             </a:fld>
             <a:endParaRPr lang="en-US"/>
           </a:p>
@@ -2431,7 +2433,7 @@
           <a:p>
             <a:fld id="{E5820CF9-F688-44A5-98E2-16B853B01EB7}" type="datetimeFigureOut">
               <a:rPr lang="en-US" smtClean="0"/>
-              <a:t>2/15/2025</a:t>
+              <a:t>2/16/2025</a:t>
             </a:fld>
             <a:endParaRPr lang="en-US"/>
           </a:p>
@@ -2719,7 +2721,7 @@
           <a:p>
             <a:fld id="{E5820CF9-F688-44A5-98E2-16B853B01EB7}" type="datetimeFigureOut">
               <a:rPr lang="en-US" smtClean="0"/>
-              <a:t>2/15/2025</a:t>
+              <a:t>2/16/2025</a:t>
             </a:fld>
             <a:endParaRPr lang="en-US"/>
           </a:p>
@@ -2960,7 +2962,7 @@
           <a:p>
             <a:fld id="{E5820CF9-F688-44A5-98E2-16B853B01EB7}" type="datetimeFigureOut">
               <a:rPr lang="en-US" smtClean="0"/>
-              <a:t>2/15/2025</a:t>
+              <a:t>2/16/2025</a:t>
             </a:fld>
             <a:endParaRPr lang="en-US"/>
           </a:p>
@@ -4165,10 +4167,10 @@
       </p:sp>
       <p:pic>
         <p:nvPicPr>
-          <p:cNvPr id="7" name="Picture 6">
-            <a:extLst>
-              <a:ext uri="{FF2B5EF4-FFF2-40B4-BE49-F238E27FC236}">
-                <a16:creationId xmlns:a16="http://schemas.microsoft.com/office/drawing/2014/main" id="{3ABE6C22-86FE-C610-D1EF-5DB34537ED6F}"/>
+          <p:cNvPr id="4" name="Picture 3">
+            <a:extLst>
+              <a:ext uri="{FF2B5EF4-FFF2-40B4-BE49-F238E27FC236}">
+                <a16:creationId xmlns:a16="http://schemas.microsoft.com/office/drawing/2014/main" id="{D2B5DDEC-4830-5482-F5AF-BAE02FCFFE13}"/>
               </a:ext>
             </a:extLst>
           </p:cNvPr>
@@ -4185,7 +4187,7 @@
         </p:blipFill>
         <p:spPr>
           <a:xfrm>
-            <a:off x="1123265" y="1085850"/>
+            <a:off x="1309105" y="1138066"/>
             <a:ext cx="9753600" cy="5486400"/>
           </a:xfrm>
           <a:prstGeom prst="rect">
@@ -4197,6 +4199,111 @@
     <p:extLst>
       <p:ext uri="{BB962C8B-B14F-4D97-AF65-F5344CB8AC3E}">
         <p14:creationId xmlns:p14="http://schemas.microsoft.com/office/powerpoint/2010/main" val="928944187"/>
+      </p:ext>
+    </p:extLst>
+  </p:cSld>
+  <p:clrMapOvr>
+    <a:masterClrMapping/>
+  </p:clrMapOvr>
+</p:sld>
+</file>
+
+<file path=ppt/slides/slide17.xml><?xml version="1.0" encoding="utf-8"?>
+<p:sld xmlns:a="http://schemas.openxmlformats.org/drawingml/2006/main" xmlns:r="http://schemas.openxmlformats.org/officeDocument/2006/relationships" xmlns:p="http://schemas.openxmlformats.org/presentationml/2006/main">
+  <p:cSld>
+    <p:spTree>
+      <p:nvGrpSpPr>
+        <p:cNvPr id="1" name="">
+          <a:extLst>
+            <a:ext uri="{FF2B5EF4-FFF2-40B4-BE49-F238E27FC236}">
+              <a16:creationId xmlns:a16="http://schemas.microsoft.com/office/drawing/2014/main" id="{0A963F19-D728-083A-5D46-096EEEEAF915}"/>
+            </a:ext>
+          </a:extLst>
+        </p:cNvPr>
+        <p:cNvGrpSpPr/>
+        <p:nvPr/>
+      </p:nvGrpSpPr>
+      <p:grpSpPr>
+        <a:xfrm>
+          <a:off x="0" y="0"/>
+          <a:ext cx="0" cy="0"/>
+          <a:chOff x="0" y="0"/>
+          <a:chExt cx="0" cy="0"/>
+        </a:xfrm>
+      </p:grpSpPr>
+      <p:sp>
+        <p:nvSpPr>
+          <p:cNvPr id="2" name="Title 1">
+            <a:extLst>
+              <a:ext uri="{FF2B5EF4-FFF2-40B4-BE49-F238E27FC236}">
+                <a16:creationId xmlns:a16="http://schemas.microsoft.com/office/drawing/2014/main" id="{125BBEA4-A675-B19E-8315-344F01B5621B}"/>
+              </a:ext>
+            </a:extLst>
+          </p:cNvPr>
+          <p:cNvSpPr>
+            <a:spLocks noGrp="1"/>
+          </p:cNvSpPr>
+          <p:nvPr>
+            <p:ph type="title"/>
+          </p:nvPr>
+        </p:nvSpPr>
+        <p:spPr>
+          <a:xfrm>
+            <a:off x="0" y="0"/>
+            <a:ext cx="10515600" cy="1325563"/>
+          </a:xfrm>
+        </p:spPr>
+        <p:txBody>
+          <a:bodyPr/>
+          <a:lstStyle/>
+          <a:p>
+            <a:r>
+              <a:rPr lang="en-US" sz="1800" b="1" dirty="0">
+                <a:solidFill>
+                  <a:srgbClr val="000000"/>
+                </a:solidFill>
+                <a:latin typeface="Calibri" panose="020F0502020204030204" pitchFamily="34" charset="0"/>
+              </a:rPr>
+              <a:t>Industry Momentum</a:t>
+            </a:r>
+            <a:endParaRPr lang="en-US" dirty="0"/>
+          </a:p>
+        </p:txBody>
+      </p:sp>
+      <p:pic>
+        <p:nvPicPr>
+          <p:cNvPr id="7" name="Picture 6">
+            <a:extLst>
+              <a:ext uri="{FF2B5EF4-FFF2-40B4-BE49-F238E27FC236}">
+                <a16:creationId xmlns:a16="http://schemas.microsoft.com/office/drawing/2014/main" id="{9D253C4F-4C95-0C1E-809F-22047813CF64}"/>
+              </a:ext>
+            </a:extLst>
+          </p:cNvPr>
+          <p:cNvPicPr>
+            <a:picLocks noChangeAspect="1"/>
+          </p:cNvPicPr>
+          <p:nvPr/>
+        </p:nvPicPr>
+        <p:blipFill>
+          <a:blip r:embed="rId2"/>
+          <a:stretch>
+            <a:fillRect/>
+          </a:stretch>
+        </p:blipFill>
+        <p:spPr>
+          <a:xfrm>
+            <a:off x="1123265" y="1085850"/>
+            <a:ext cx="9753600" cy="5486400"/>
+          </a:xfrm>
+          <a:prstGeom prst="rect">
+            <a:avLst/>
+          </a:prstGeom>
+        </p:spPr>
+      </p:pic>
+    </p:spTree>
+    <p:extLst>
+      <p:ext uri="{BB962C8B-B14F-4D97-AF65-F5344CB8AC3E}">
+        <p14:creationId xmlns:p14="http://schemas.microsoft.com/office/powerpoint/2010/main" val="3239670745"/>
       </p:ext>
     </p:extLst>
   </p:cSld>
